--- a/presentation/Project_Presentation.pptx
+++ b/presentation/Project_Presentation.pptx
@@ -1933,7 +1933,7 @@
           <a:lstStyle/>
           <a:p>
             <a:r>
-              <a:t>Bottom: dataset, preprocessing, one document per enrolment, embeddings, LanceDB plus BM25, model training. Middle: React console, FastAPI with input guardrails, the LangGraph workflow. Claude drafts text; code decides facts; every step has a computed fallback. Evaluation and the feedback loop alongside.</a:t>
+              <a:t>Bottom: dataset, preprocessing, one document per enrolment, embeddings, LanceDB plus BM25, model training. Middle: React console, FastAPI with input guardrails, then the support-plan workflow: evidence assembled in code, the LangGraph agents (performance, risk, router and intervention, critic), then the precedent synthesis. Claude Sonnet drafts text; code decides facts; every step has a computed fallback. Evaluation and the feedback loop alongside.</a:t>
             </a:r>
           </a:p>
         </p:txBody>
